--- a/lecons/USA/Environment and Development/14_USA_ENV_L14_Aid_and_Interdependence.pptx
+++ b/lecons/USA/Environment and Development/14_USA_ENV_L14_Aid_and_Interdependence.pptx
@@ -4517,7 +4517,7 @@
           <a:p>
             <a:r>
               <a:rPr lang="en-US" dirty="0"/>
-              <a:t>For your homework: Find an aid project in your region and write who funds it and what it does. We shall correct it at the beginning of our next lesson.</a:t>
+              <a:t>For your homework: List five conventional signs used on topographic maps. We shall correct it at the beginning of our next lesson.</a:t>
             </a:r>
             <a:endParaRPr lang="en-US" dirty="0"/>
           </a:p>
@@ -4605,7 +4605,7 @@
           <a:p>
             <a:r>
               <a:rPr lang="en-US" dirty="0"/>
-              <a:t>Our next lesson will be on Further Study 1: Contrast in Development within Cameroon. Thank you for your attention, and see you next time.</a:t>
+              <a:t>Our next lesson will be on Map Analysis 1: Review of Map Reading Principles. Thank you for your attention, and see you next time.</a:t>
             </a:r>
             <a:endParaRPr lang="en-US" dirty="0"/>
           </a:p>
@@ -17987,7 +17987,7 @@
                 <a:ea typeface="Times New Roman" pitchFamily="34" charset="-122"/>
                 <a:cs typeface="Times New Roman" pitchFamily="34" charset="-120"/>
               </a:rPr>
-              <a:t>Find an aid project in your region and write who funds it and what it does.</a:t>
+              <a:t>List five conventional signs used on topographic maps.</a:t>
             </a:r>
             <a:endParaRPr lang="en-US" sz="4000" dirty="0"/>
           </a:p>
@@ -18226,7 +18226,7 @@
                 <a:ea typeface="Times New Roman" pitchFamily="34" charset="-122"/>
                 <a:cs typeface="Times New Roman" pitchFamily="34" charset="-120"/>
               </a:rPr>
-              <a:t>Further Study 1: Contrast in Development within Cameroon</a:t>
+              <a:t>Map Analysis 1: Review of Map Reading Principles</a:t>
             </a:r>
             <a:endParaRPr lang="en-US" sz="4000" dirty="0"/>
           </a:p>
@@ -20651,7 +20651,7 @@
                           <a:ea typeface="Calibri" pitchFamily="34" charset="-122"/>
                           <a:cs typeface="Calibri" pitchFamily="34" charset="-120"/>
                         </a:rPr>
-                        <a:t>Find an aid project in your region and write who funds it and what it does.</a:t>
+                        <a:t>List five conventional signs used on topographic maps.</a:t>
                       </a:r>
                       <a:endParaRPr lang="en-US" sz="1600" dirty="0">
                         <a:latin typeface="Calibri" charset="0"/>
